--- a/classes/parte-17-profundizacion-para-certificaciones/318-gestion-del-programa-de-vulnerabilidades/clase-318-presentacion.pptx
+++ b/classes/parte-17-profundizacion-para-certificaciones/318-gestion-del-programa-de-vulnerabilidades/clase-318-presentacion.pptx
@@ -17,6 +17,10 @@
     <p:sldId id="265" r:id="rId16"/>
     <p:sldId id="266" r:id="rId17"/>
     <p:sldId id="267" r:id="rId18"/>
+    <p:sldId id="268" r:id="rId19"/>
+    <p:sldId id="269" r:id="rId20"/>
+    <p:sldId id="270" r:id="rId21"/>
+    <p:sldId id="271" r:id="rId22"/>
   </p:sldIdLst>
   <p:sldSz cx="9144000" cy="6858000" type="screen4x3"/>
   <p:notesSz cx="6858000" cy="9144000"/>
@@ -3198,7 +3202,7 @@
                   <a:srgbClr val="0B3D2E"/>
                 </a:solidFill>
               </a:rPr>
-              <a:t>⚠️ Errores comunes</a:t>
+              <a:t>🧪 Laboratorio guiado — Construir un pipeline de priorización de VM</a:t>
             </a:r>
           </a:p>
         </p:txBody>
@@ -3236,82 +3240,97 @@
                   <a:srgbClr val="22282E"/>
                 </a:solidFill>
               </a:rPr>
-              <a:t>•  "Priorizo solo por CVSS 9–10 y nunca acabo" — CVSS mide severidad, no riesgo. Añade EPSS y KEV para enfocar lo realmente explotable.</a:t>
-            </a:r>
-          </a:p>
-          <a:p>
-            <a:pPr>
-              <a:spcAft>
-                <a:spcPts val="600"/>
-              </a:spcAft>
-            </a:pPr>
-            <a:r>
-              <a:rPr sz="1500">
-                <a:solidFill>
-                  <a:srgbClr val="22282E"/>
-                </a:solidFill>
-              </a:rPr>
-              <a:t>•  "Muchos falsos positivos en el reporte" — Escaneo no autenticado. Usa escaneo con credenciales para leer versiones/parches reales.</a:t>
-            </a:r>
-          </a:p>
-          <a:p>
-            <a:pPr>
-              <a:spcAft>
-                <a:spcPts val="600"/>
-              </a:spcAft>
-            </a:pPr>
-            <a:r>
-              <a:rPr sz="1500">
-                <a:solidFill>
-                  <a:srgbClr val="22282E"/>
-                </a:solidFill>
-              </a:rPr>
-              <a:t>•  "El escáner tiró un servicio en producción" — Escaneo agresivo/inseguro sobre activos sensibles. Ajusta la política, usa ventanas y escaneo pasivo donde aplique.</a:t>
-            </a:r>
-          </a:p>
-          <a:p>
-            <a:pPr>
-              <a:spcAft>
-                <a:spcPts val="600"/>
-              </a:spcAft>
-            </a:pPr>
-            <a:r>
-              <a:rPr sz="1500">
-                <a:solidFill>
-                  <a:srgbClr val="22282E"/>
-                </a:solidFill>
-              </a:rPr>
-              <a:t>•  "Las excepciones no vencen nunca" — Excepción sin fecha de revisión. Toda excepción debe tener dueño, compensaciones y caducidad.</a:t>
-            </a:r>
-          </a:p>
-          <a:p>
-            <a:pPr>
-              <a:spcAft>
-                <a:spcPts val="600"/>
-              </a:spcAft>
-            </a:pPr>
-            <a:r>
-              <a:rPr sz="1500">
-                <a:solidFill>
-                  <a:srgbClr val="22282E"/>
-                </a:solidFill>
-              </a:rPr>
-              <a:t>•  "No sé si mejoramos" — Faltan métricas de tendencia. Mide MTTR, aging y % dentro de SLA mes a mes.</a:t>
-            </a:r>
-          </a:p>
-          <a:p>
-            <a:pPr>
-              <a:spcAft>
-                <a:spcPts val="600"/>
-              </a:spcAft>
-            </a:pPr>
-            <a:r>
-              <a:rPr sz="1500">
-                <a:solidFill>
-                  <a:srgbClr val="22282E"/>
-                </a:solidFill>
-              </a:rPr>
-              <a:t>•  "Escaneo trimestral y me sorprenden 0-days" — Cadencia insuficiente. Combina escaneo continuo con alimentación de threat intel (KEV).</a:t>
+              <a:t>•  Ejercicio aplicado: escanearás un objetivo de laboratorio y construirás una cola de remediación priorizada por riesgo con SLAs.</a:t>
+            </a:r>
+          </a:p>
+          <a:p>
+            <a:pPr>
+              <a:spcAft>
+                <a:spcPts val="600"/>
+              </a:spcAft>
+            </a:pPr>
+            <a:r>
+              <a:rPr sz="1500">
+                <a:solidFill>
+                  <a:srgbClr val="22282E"/>
+                </a:solidFill>
+              </a:rPr>
+              <a:t>•  Inventaría el objetivo. En la red host-only, identifica el activo (Metasploitable) y clasifícalo por criticidad de negocio (aquí: bajo, es lab).</a:t>
+            </a:r>
+          </a:p>
+          <a:p>
+            <a:pPr>
+              <a:spcAft>
+                <a:spcPts val="600"/>
+              </a:spcAft>
+            </a:pPr>
+            <a:r>
+              <a:rPr sz="1500">
+                <a:solidFill>
+                  <a:srgbClr val="22282E"/>
+                </a:solidFill>
+              </a:rPr>
+              <a:t>•  Escaneo no autenticado. Lanza Greenbone/OpenVAS contra el objetivo. Guarda el reporte (lista de CVEs con CVSS).</a:t>
+            </a:r>
+          </a:p>
+          <a:p>
+            <a:pPr>
+              <a:spcAft>
+                <a:spcPts val="600"/>
+              </a:spcAft>
+            </a:pPr>
+            <a:r>
+              <a:rPr sz="1500">
+                <a:solidFill>
+                  <a:srgbClr val="22282E"/>
+                </a:solidFill>
+              </a:rPr>
+              <a:t>•  Escaneo autenticado. Repite con credenciales del sistema y compara: observa cuántas vulnerabilidades adicionales aparecen y cuántos falsos positivos se reducen.</a:t>
+            </a:r>
+          </a:p>
+          <a:p>
+            <a:pPr>
+              <a:spcAft>
+                <a:spcPts val="600"/>
+              </a:spcAft>
+            </a:pPr>
+            <a:r>
+              <a:rPr sz="1500">
+                <a:solidFill>
+                  <a:srgbClr val="22282E"/>
+                </a:solidFill>
+              </a:rPr>
+              <a:t>•  Extrae las CVEs. Exporta a CSV: CVE, CVSSbase, activo, severidad.</a:t>
+            </a:r>
+          </a:p>
+          <a:p>
+            <a:pPr>
+              <a:spcAft>
+                <a:spcPts val="600"/>
+              </a:spcAft>
+            </a:pPr>
+            <a:r>
+              <a:rPr sz="1500">
+                <a:solidFill>
+                  <a:srgbClr val="22282E"/>
+                </a:solidFill>
+              </a:rPr>
+              <a:t>•  Enriquece con EPSS. Consulta la API de FIRST (https://api.first.org/data/v1/epss?cve=CVE-XXXX-YYYY) y añade la columna epss.</a:t>
+            </a:r>
+          </a:p>
+          <a:p>
+            <a:pPr>
+              <a:spcAft>
+                <a:spcPts val="600"/>
+              </a:spcAft>
+            </a:pPr>
+            <a:r>
+              <a:rPr sz="1500">
+                <a:solidFill>
+                  <a:srgbClr val="22282E"/>
+                </a:solidFill>
+              </a:rPr>
+              <a:t>•  Cruza con KEV. Descarga el JSON de CISA KEV y marca enkev = sí/no para cada CVE.</a:t>
             </a:r>
           </a:p>
         </p:txBody>
@@ -3362,7 +3381,7 @@
                   <a:srgbClr val="0B3D2E"/>
                 </a:solidFill>
               </a:rPr>
-              <a:t>❓ Preguntas frecuentes</a:t>
+              <a:t>✍️ Ejercicios</a:t>
             </a:r>
           </a:p>
         </p:txBody>
@@ -3400,97 +3419,82 @@
                   <a:srgbClr val="22282E"/>
                 </a:solidFill>
               </a:rPr>
-              <a:t>•  ❓ ¿CVSS o EPSS?</a:t>
-            </a:r>
-          </a:p>
-          <a:p>
-            <a:pPr>
-              <a:spcAft>
-                <a:spcPts val="600"/>
-              </a:spcAft>
-            </a:pPr>
-            <a:r>
-              <a:rPr sz="1500">
-                <a:solidFill>
-                  <a:srgbClr val="22282E"/>
-                </a:solidFill>
-              </a:rPr>
-              <a:t>•  Ambos, más KEV. CVSS te dice cuán grave es técnicamente; EPSS, qué tan probable es que la exploten; KEV, si ya la están explotando. Priorizar con las tres reduce ruido y enfoca el esfuerzo.</a:t>
-            </a:r>
-          </a:p>
-          <a:p>
-            <a:pPr>
-              <a:spcAft>
-                <a:spcPts val="600"/>
-              </a:spcAft>
-            </a:pPr>
-            <a:r>
-              <a:rPr sz="1500">
-                <a:solidFill>
-                  <a:srgbClr val="22282E"/>
-                </a:solidFill>
-              </a:rPr>
-              <a:t>•  ❓ ¿Cada cuánto debo escanear?</a:t>
-            </a:r>
-          </a:p>
-          <a:p>
-            <a:pPr>
-              <a:spcAft>
-                <a:spcPts val="600"/>
-              </a:spcAft>
-            </a:pPr>
-            <a:r>
-              <a:rPr sz="1500">
-                <a:solidFill>
-                  <a:srgbClr val="22282E"/>
-                </a:solidFill>
-              </a:rPr>
-              <a:t>•  NIST SP 800-40 Rev.4 promueve gestión continua. En la práctica: escaneo continuo/semanal para activos expuestos, mensual para internos, y re-escaneo inmediato tras remediar o tras una entrada nueva en KEV.</a:t>
-            </a:r>
-          </a:p>
-          <a:p>
-            <a:pPr>
-              <a:spcAft>
-                <a:spcPts val="600"/>
-              </a:spcAft>
-            </a:pPr>
-            <a:r>
-              <a:rPr sz="1500">
-                <a:solidFill>
-                  <a:srgbClr val="22282E"/>
-                </a:solidFill>
-              </a:rPr>
-              <a:t>•  ❓ ¿Parcheo o mitigo?</a:t>
-            </a:r>
-          </a:p>
-          <a:p>
-            <a:pPr>
-              <a:spcAft>
-                <a:spcPts val="600"/>
-              </a:spcAft>
-            </a:pPr>
-            <a:r>
-              <a:rPr sz="1500">
-                <a:solidFill>
-                  <a:srgbClr val="22282E"/>
-                </a:solidFill>
-              </a:rPr>
-              <a:t>•  El parche es la remediación definitiva; cuando no es posible a tiempo, aplica mitigaciones compensatorias (segmentación, WAF, deshabilitar el servicio) y documenta la excepción con fecha de revisión.</a:t>
-            </a:r>
-          </a:p>
-          <a:p>
-            <a:pPr>
-              <a:spcAft>
-                <a:spcPts val="600"/>
-              </a:spcAft>
-            </a:pPr>
-            <a:r>
-              <a:rPr sz="1500">
-                <a:solidFill>
-                  <a:srgbClr val="22282E"/>
-                </a:solidFill>
-              </a:rPr>
-              <a:t>•  ❓ ¿Qué métricas presento a la dirección?</a:t>
+              <a:t>•  Dada una lista de 5 CVEs con su CVSS y EPSS, ordénalas por riesgo y justifica por qué EPSS puede subir o bajar la prioridad frente a CVSS solo.</a:t>
+            </a:r>
+          </a:p>
+          <a:p>
+            <a:pPr>
+              <a:spcAft>
+                <a:spcPts val="600"/>
+              </a:spcAft>
+            </a:pPr>
+            <a:r>
+              <a:rPr sz="1500">
+                <a:solidFill>
+                  <a:srgbClr val="22282E"/>
+                </a:solidFill>
+              </a:rPr>
+              <a:t>•  Explica por qué una CVE con CVSS 6.5 en KEV puede ser más urgente que una CVSS 9.8 que no lo está.</a:t>
+            </a:r>
+          </a:p>
+          <a:p>
+            <a:pPr>
+              <a:spcAft>
+                <a:spcPts val="600"/>
+              </a:spcAft>
+            </a:pPr>
+            <a:r>
+              <a:rPr sz="1500">
+                <a:solidFill>
+                  <a:srgbClr val="22282E"/>
+                </a:solidFill>
+              </a:rPr>
+              <a:t>•  Diseña una tabla de SLAs para tres niveles de criticidad de activo (crítico/importante/estándar) × cuatro prioridades.</a:t>
+            </a:r>
+          </a:p>
+          <a:p>
+            <a:pPr>
+              <a:spcAft>
+                <a:spcPts val="600"/>
+              </a:spcAft>
+            </a:pPr>
+            <a:r>
+              <a:rPr sz="1500">
+                <a:solidFill>
+                  <a:srgbClr val="22282E"/>
+                </a:solidFill>
+              </a:rPr>
+              <a:t>•  Redacta una plantilla de excepción de riesgo con todos los campos obligatorios.</a:t>
+            </a:r>
+          </a:p>
+          <a:p>
+            <a:pPr>
+              <a:spcAft>
+                <a:spcPts val="600"/>
+              </a:spcAft>
+            </a:pPr>
+            <a:r>
+              <a:rPr sz="1500">
+                <a:solidFill>
+                  <a:srgbClr val="22282E"/>
+                </a:solidFill>
+              </a:rPr>
+              <a:t>•  Calcula el MTTR de un conjunto de tickets con fechas de apertura/cierre dado.</a:t>
+            </a:r>
+          </a:p>
+          <a:p>
+            <a:pPr>
+              <a:spcAft>
+                <a:spcPts val="600"/>
+              </a:spcAft>
+            </a:pPr>
+            <a:r>
+              <a:rPr sz="1500">
+                <a:solidFill>
+                  <a:srgbClr val="22282E"/>
+                </a:solidFill>
+              </a:rPr>
+              <a:t>•  Propón tres métricas para reportar al comité de riesgos y qué decisión habilita cada una.</a:t>
             </a:r>
           </a:p>
         </p:txBody>
@@ -3541,7 +3545,7 @@
                   <a:srgbClr val="0B3D2E"/>
                 </a:solidFill>
               </a:rPr>
-              <a:t>🔗 Referencias</a:t>
+              <a:t>📝 Reto verificable</a:t>
             </a:r>
           </a:p>
         </p:txBody>
@@ -3579,6 +3583,528 @@
                   <a:srgbClr val="22282E"/>
                 </a:solidFill>
               </a:rPr>
+              <a:t>•  Reto: entrega un pipeline de priorización de VM funcional que cruce, para al menos 15 CVEs reales, CVSS + EPSS + KEV y produzca una cola ordenada con SLAs asignados y métricas del ciclo.</a:t>
+            </a:r>
+          </a:p>
+          <a:p>
+            <a:pPr>
+              <a:spcAft>
+                <a:spcPts val="600"/>
+              </a:spcAft>
+            </a:pPr>
+            <a:r>
+              <a:rPr sz="1500">
+                <a:solidFill>
+                  <a:srgbClr val="22282E"/>
+                </a:solidFill>
+              </a:rPr>
+              <a:t>•  Criterio de aceptación:</a:t>
+            </a:r>
+          </a:p>
+          <a:p>
+            <a:pPr>
+              <a:spcAft>
+                <a:spcPts val="600"/>
+              </a:spcAft>
+            </a:pPr>
+            <a:r>
+              <a:rPr sz="1500">
+                <a:solidFill>
+                  <a:srgbClr val="22282E"/>
+                </a:solidFill>
+              </a:rPr>
+              <a:t>•  Toda CVE presente en KEV queda como prioridad máxima, independientemente de su CVSS.</a:t>
+            </a:r>
+          </a:p>
+          <a:p>
+            <a:pPr>
+              <a:spcAft>
+                <a:spcPts val="600"/>
+              </a:spcAft>
+            </a:pPr>
+            <a:r>
+              <a:rPr sz="1500">
+                <a:solidFill>
+                  <a:srgbClr val="22282E"/>
+                </a:solidFill>
+              </a:rPr>
+              <a:t>•  La priorización usa las tres señales (severidad, probabilidad, explotación activa), no solo CVSS.</a:t>
+            </a:r>
+          </a:p>
+          <a:p>
+            <a:pPr>
+              <a:spcAft>
+                <a:spcPts val="600"/>
+              </a:spcAft>
+            </a:pPr>
+            <a:r>
+              <a:rPr sz="1500">
+                <a:solidFill>
+                  <a:srgbClr val="22282E"/>
+                </a:solidFill>
+              </a:rPr>
+              <a:t>•  Cada prioridad tiene un SLA numérico y una fecha límite calculada desde la detección.</a:t>
+            </a:r>
+          </a:p>
+          <a:p>
+            <a:pPr>
+              <a:spcAft>
+                <a:spcPts val="600"/>
+              </a:spcAft>
+            </a:pPr>
+            <a:r>
+              <a:rPr sz="1500">
+                <a:solidFill>
+                  <a:srgbClr val="22282E"/>
+                </a:solidFill>
+              </a:rPr>
+              <a:t>•  Se reportan al menos MTTR y % de remediación dentro de SLA.</a:t>
+            </a:r>
+          </a:p>
+        </p:txBody>
+      </p:sp>
+    </p:spTree>
+  </p:cSld>
+  <p:clrMapOvr>
+    <a:masterClrMapping/>
+  </p:clrMapOvr>
+</p:sld>
+</file>
+
+<file path=ppt/slides/slide13.xml><?xml version="1.0" encoding="utf-8"?>
+<p:sld xmlns:a="http://schemas.openxmlformats.org/drawingml/2006/main" xmlns:p="http://schemas.openxmlformats.org/presentationml/2006/main" xmlns:r="http://schemas.openxmlformats.org/officeDocument/2006/relationships">
+  <p:cSld>
+    <p:spTree>
+      <p:nvGrpSpPr>
+        <p:cNvPr id="1" name=""/>
+        <p:cNvGrpSpPr/>
+        <p:nvPr/>
+      </p:nvGrpSpPr>
+      <p:grpSpPr/>
+      <p:sp>
+        <p:nvSpPr>
+          <p:cNvPr id="2" name="TextBox 1"/>
+          <p:cNvSpPr txBox="1"/>
+          <p:nvPr/>
+        </p:nvSpPr>
+        <p:spPr>
+          <a:xfrm>
+            <a:off x="457200" y="320040"/>
+            <a:ext cx="8229600" cy="822960"/>
+          </a:xfrm>
+          <a:prstGeom prst="rect">
+            <a:avLst/>
+          </a:prstGeom>
+          <a:noFill/>
+        </p:spPr>
+        <p:txBody>
+          <a:bodyPr wrap="square">
+            <a:spAutoFit/>
+          </a:bodyPr>
+          <a:lstStyle/>
+          <a:p>
+            <a:r>
+              <a:rPr sz="2600" b="1">
+                <a:solidFill>
+                  <a:srgbClr val="0B3D2E"/>
+                </a:solidFill>
+              </a:rPr>
+              <a:t>⚠️ Errores comunes</a:t>
+            </a:r>
+          </a:p>
+        </p:txBody>
+      </p:sp>
+      <p:sp>
+        <p:nvSpPr>
+          <p:cNvPr id="3" name="TextBox 2"/>
+          <p:cNvSpPr txBox="1"/>
+          <p:nvPr/>
+        </p:nvSpPr>
+        <p:spPr>
+          <a:xfrm>
+            <a:off x="457200" y="1280160"/>
+            <a:ext cx="8229600" cy="4937760"/>
+          </a:xfrm>
+          <a:prstGeom prst="rect">
+            <a:avLst/>
+          </a:prstGeom>
+          <a:noFill/>
+        </p:spPr>
+        <p:txBody>
+          <a:bodyPr wrap="square">
+            <a:spAutoFit/>
+          </a:bodyPr>
+          <a:lstStyle/>
+          <a:p>
+            <a:pPr>
+              <a:spcAft>
+                <a:spcPts val="600"/>
+              </a:spcAft>
+            </a:pPr>
+            <a:r>
+              <a:rPr sz="1500">
+                <a:solidFill>
+                  <a:srgbClr val="22282E"/>
+                </a:solidFill>
+              </a:rPr>
+              <a:t>•  "Priorizo solo por CVSS 9–10 y nunca acabo" — CVSS mide severidad, no riesgo. Añade EPSS y KEV para enfocar lo realmente explotable.</a:t>
+            </a:r>
+          </a:p>
+          <a:p>
+            <a:pPr>
+              <a:spcAft>
+                <a:spcPts val="600"/>
+              </a:spcAft>
+            </a:pPr>
+            <a:r>
+              <a:rPr sz="1500">
+                <a:solidFill>
+                  <a:srgbClr val="22282E"/>
+                </a:solidFill>
+              </a:rPr>
+              <a:t>•  "Muchos falsos positivos en el reporte" — Escaneo no autenticado. Usa escaneo con credenciales para leer versiones/parches reales.</a:t>
+            </a:r>
+          </a:p>
+          <a:p>
+            <a:pPr>
+              <a:spcAft>
+                <a:spcPts val="600"/>
+              </a:spcAft>
+            </a:pPr>
+            <a:r>
+              <a:rPr sz="1500">
+                <a:solidFill>
+                  <a:srgbClr val="22282E"/>
+                </a:solidFill>
+              </a:rPr>
+              <a:t>•  "El escáner tiró un servicio en producción" — Escaneo agresivo/inseguro sobre activos sensibles. Ajusta la política, usa ventanas y escaneo pasivo donde aplique.</a:t>
+            </a:r>
+          </a:p>
+          <a:p>
+            <a:pPr>
+              <a:spcAft>
+                <a:spcPts val="600"/>
+              </a:spcAft>
+            </a:pPr>
+            <a:r>
+              <a:rPr sz="1500">
+                <a:solidFill>
+                  <a:srgbClr val="22282E"/>
+                </a:solidFill>
+              </a:rPr>
+              <a:t>•  "Las excepciones no vencen nunca" — Excepción sin fecha de revisión. Toda excepción debe tener dueño, compensaciones y caducidad.</a:t>
+            </a:r>
+          </a:p>
+          <a:p>
+            <a:pPr>
+              <a:spcAft>
+                <a:spcPts val="600"/>
+              </a:spcAft>
+            </a:pPr>
+            <a:r>
+              <a:rPr sz="1500">
+                <a:solidFill>
+                  <a:srgbClr val="22282E"/>
+                </a:solidFill>
+              </a:rPr>
+              <a:t>•  "No sé si mejoramos" — Faltan métricas de tendencia. Mide MTTR, aging y % dentro de SLA mes a mes.</a:t>
+            </a:r>
+          </a:p>
+          <a:p>
+            <a:pPr>
+              <a:spcAft>
+                <a:spcPts val="600"/>
+              </a:spcAft>
+            </a:pPr>
+            <a:r>
+              <a:rPr sz="1500">
+                <a:solidFill>
+                  <a:srgbClr val="22282E"/>
+                </a:solidFill>
+              </a:rPr>
+              <a:t>•  "Escaneo trimestral y me sorprenden 0-days" — Cadencia insuficiente. Combina escaneo continuo con alimentación de threat intel (KEV).</a:t>
+            </a:r>
+          </a:p>
+        </p:txBody>
+      </p:sp>
+    </p:spTree>
+  </p:cSld>
+  <p:clrMapOvr>
+    <a:masterClrMapping/>
+  </p:clrMapOvr>
+</p:sld>
+</file>
+
+<file path=ppt/slides/slide14.xml><?xml version="1.0" encoding="utf-8"?>
+<p:sld xmlns:a="http://schemas.openxmlformats.org/drawingml/2006/main" xmlns:p="http://schemas.openxmlformats.org/presentationml/2006/main" xmlns:r="http://schemas.openxmlformats.org/officeDocument/2006/relationships">
+  <p:cSld>
+    <p:spTree>
+      <p:nvGrpSpPr>
+        <p:cNvPr id="1" name=""/>
+        <p:cNvGrpSpPr/>
+        <p:nvPr/>
+      </p:nvGrpSpPr>
+      <p:grpSpPr/>
+      <p:sp>
+        <p:nvSpPr>
+          <p:cNvPr id="2" name="TextBox 1"/>
+          <p:cNvSpPr txBox="1"/>
+          <p:nvPr/>
+        </p:nvSpPr>
+        <p:spPr>
+          <a:xfrm>
+            <a:off x="457200" y="320040"/>
+            <a:ext cx="8229600" cy="822960"/>
+          </a:xfrm>
+          <a:prstGeom prst="rect">
+            <a:avLst/>
+          </a:prstGeom>
+          <a:noFill/>
+        </p:spPr>
+        <p:txBody>
+          <a:bodyPr wrap="square">
+            <a:spAutoFit/>
+          </a:bodyPr>
+          <a:lstStyle/>
+          <a:p>
+            <a:r>
+              <a:rPr sz="2600" b="1">
+                <a:solidFill>
+                  <a:srgbClr val="0B3D2E"/>
+                </a:solidFill>
+              </a:rPr>
+              <a:t>❓ Preguntas frecuentes</a:t>
+            </a:r>
+          </a:p>
+        </p:txBody>
+      </p:sp>
+      <p:sp>
+        <p:nvSpPr>
+          <p:cNvPr id="3" name="TextBox 2"/>
+          <p:cNvSpPr txBox="1"/>
+          <p:nvPr/>
+        </p:nvSpPr>
+        <p:spPr>
+          <a:xfrm>
+            <a:off x="457200" y="1280160"/>
+            <a:ext cx="8229600" cy="4937760"/>
+          </a:xfrm>
+          <a:prstGeom prst="rect">
+            <a:avLst/>
+          </a:prstGeom>
+          <a:noFill/>
+        </p:spPr>
+        <p:txBody>
+          <a:bodyPr wrap="square">
+            <a:spAutoFit/>
+          </a:bodyPr>
+          <a:lstStyle/>
+          <a:p>
+            <a:pPr>
+              <a:spcAft>
+                <a:spcPts val="600"/>
+              </a:spcAft>
+            </a:pPr>
+            <a:r>
+              <a:rPr sz="1500">
+                <a:solidFill>
+                  <a:srgbClr val="22282E"/>
+                </a:solidFill>
+              </a:rPr>
+              <a:t>•  ❓ ¿CVSS o EPSS?</a:t>
+            </a:r>
+          </a:p>
+          <a:p>
+            <a:pPr>
+              <a:spcAft>
+                <a:spcPts val="600"/>
+              </a:spcAft>
+            </a:pPr>
+            <a:r>
+              <a:rPr sz="1500">
+                <a:solidFill>
+                  <a:srgbClr val="22282E"/>
+                </a:solidFill>
+              </a:rPr>
+              <a:t>•  Ambos, más KEV. CVSS te dice cuán grave es técnicamente; EPSS, qué tan probable es que la exploten; KEV, si ya la están explotando. Priorizar con las tres reduce ruido y enfoca el esfuerzo.</a:t>
+            </a:r>
+          </a:p>
+          <a:p>
+            <a:pPr>
+              <a:spcAft>
+                <a:spcPts val="600"/>
+              </a:spcAft>
+            </a:pPr>
+            <a:r>
+              <a:rPr sz="1500">
+                <a:solidFill>
+                  <a:srgbClr val="22282E"/>
+                </a:solidFill>
+              </a:rPr>
+              <a:t>•  ❓ ¿Cada cuánto debo escanear?</a:t>
+            </a:r>
+          </a:p>
+          <a:p>
+            <a:pPr>
+              <a:spcAft>
+                <a:spcPts val="600"/>
+              </a:spcAft>
+            </a:pPr>
+            <a:r>
+              <a:rPr sz="1500">
+                <a:solidFill>
+                  <a:srgbClr val="22282E"/>
+                </a:solidFill>
+              </a:rPr>
+              <a:t>•  NIST SP 800-40 Rev.4 promueve gestión continua. En la práctica: escaneo continuo/semanal para activos expuestos, mensual para internos, y re-escaneo inmediato tras remediar o tras una entrada nueva…</a:t>
+            </a:r>
+          </a:p>
+          <a:p>
+            <a:pPr>
+              <a:spcAft>
+                <a:spcPts val="600"/>
+              </a:spcAft>
+            </a:pPr>
+            <a:r>
+              <a:rPr sz="1500">
+                <a:solidFill>
+                  <a:srgbClr val="22282E"/>
+                </a:solidFill>
+              </a:rPr>
+              <a:t>•  ❓ ¿Parcheo o mitigo?</a:t>
+            </a:r>
+          </a:p>
+          <a:p>
+            <a:pPr>
+              <a:spcAft>
+                <a:spcPts val="600"/>
+              </a:spcAft>
+            </a:pPr>
+            <a:r>
+              <a:rPr sz="1500">
+                <a:solidFill>
+                  <a:srgbClr val="22282E"/>
+                </a:solidFill>
+              </a:rPr>
+              <a:t>•  El parche es la remediación definitiva; cuando no es posible a tiempo, aplica mitigaciones compensatorias (segmentación, WAF, deshabilitar el servicio) y documenta la excepción con fecha de revisión.</a:t>
+            </a:r>
+          </a:p>
+          <a:p>
+            <a:pPr>
+              <a:spcAft>
+                <a:spcPts val="600"/>
+              </a:spcAft>
+            </a:pPr>
+            <a:r>
+              <a:rPr sz="1500">
+                <a:solidFill>
+                  <a:srgbClr val="22282E"/>
+                </a:solidFill>
+              </a:rPr>
+              <a:t>•  ❓ ¿Qué métricas presento a la dirección?</a:t>
+            </a:r>
+          </a:p>
+        </p:txBody>
+      </p:sp>
+    </p:spTree>
+  </p:cSld>
+  <p:clrMapOvr>
+    <a:masterClrMapping/>
+  </p:clrMapOvr>
+</p:sld>
+</file>
+
+<file path=ppt/slides/slide15.xml><?xml version="1.0" encoding="utf-8"?>
+<p:sld xmlns:a="http://schemas.openxmlformats.org/drawingml/2006/main" xmlns:p="http://schemas.openxmlformats.org/presentationml/2006/main" xmlns:r="http://schemas.openxmlformats.org/officeDocument/2006/relationships">
+  <p:cSld>
+    <p:spTree>
+      <p:nvGrpSpPr>
+        <p:cNvPr id="1" name=""/>
+        <p:cNvGrpSpPr/>
+        <p:nvPr/>
+      </p:nvGrpSpPr>
+      <p:grpSpPr/>
+      <p:sp>
+        <p:nvSpPr>
+          <p:cNvPr id="2" name="TextBox 1"/>
+          <p:cNvSpPr txBox="1"/>
+          <p:nvPr/>
+        </p:nvSpPr>
+        <p:spPr>
+          <a:xfrm>
+            <a:off x="457200" y="320040"/>
+            <a:ext cx="8229600" cy="822960"/>
+          </a:xfrm>
+          <a:prstGeom prst="rect">
+            <a:avLst/>
+          </a:prstGeom>
+          <a:noFill/>
+        </p:spPr>
+        <p:txBody>
+          <a:bodyPr wrap="square">
+            <a:spAutoFit/>
+          </a:bodyPr>
+          <a:lstStyle/>
+          <a:p>
+            <a:r>
+              <a:rPr sz="2600" b="1">
+                <a:solidFill>
+                  <a:srgbClr val="0B3D2E"/>
+                </a:solidFill>
+              </a:rPr>
+              <a:t>🔗 Referencias</a:t>
+            </a:r>
+          </a:p>
+        </p:txBody>
+      </p:sp>
+      <p:sp>
+        <p:nvSpPr>
+          <p:cNvPr id="3" name="TextBox 2"/>
+          <p:cNvSpPr txBox="1"/>
+          <p:nvPr/>
+        </p:nvSpPr>
+        <p:spPr>
+          <a:xfrm>
+            <a:off x="457200" y="1280160"/>
+            <a:ext cx="8229600" cy="4937760"/>
+          </a:xfrm>
+          <a:prstGeom prst="rect">
+            <a:avLst/>
+          </a:prstGeom>
+          <a:noFill/>
+        </p:spPr>
+        <p:txBody>
+          <a:bodyPr wrap="square">
+            <a:spAutoFit/>
+          </a:bodyPr>
+          <a:lstStyle/>
+          <a:p>
+            <a:pPr>
+              <a:spcAft>
+                <a:spcPts val="600"/>
+              </a:spcAft>
+            </a:pPr>
+            <a:r>
+              <a:rPr sz="1500">
+                <a:solidFill>
+                  <a:srgbClr val="22282E"/>
+                </a:solidFill>
+              </a:rPr>
+              <a:t>•  🏢 En la empresa: el ciclo se gestiona con plataformas de VM como Qualys VMDR, Tenable.io y Rapid7 InsightVM; el enfoque (descubrir → priorizar CVSS/EPSS/KEV → SLA → verificar) es el mismo.</a:t>
+            </a:r>
+          </a:p>
+          <a:p>
+            <a:pPr>
+              <a:spcAft>
+                <a:spcPts val="600"/>
+              </a:spcAft>
+            </a:pPr>
+            <a:r>
+              <a:rPr sz="1500">
+                <a:solidFill>
+                  <a:srgbClr val="22282E"/>
+                </a:solidFill>
+              </a:rPr>
               <a:t>•  NIST. Guide to Enterprise Patch Management Planning — SP 800-40 Rev.4.</a:t>
             </a:r>
           </a:p>
@@ -3644,6 +4170,81 @@
           </a:p>
         </p:txBody>
       </p:sp>
+    </p:spTree>
+  </p:cSld>
+  <p:clrMapOvr>
+    <a:masterClrMapping/>
+  </p:clrMapOvr>
+</p:sld>
+</file>
+
+<file path=ppt/slides/slide16.xml><?xml version="1.0" encoding="utf-8"?>
+<p:sld xmlns:a="http://schemas.openxmlformats.org/drawingml/2006/main" xmlns:p="http://schemas.openxmlformats.org/presentationml/2006/main" xmlns:r="http://schemas.openxmlformats.org/officeDocument/2006/relationships">
+  <p:cSld>
+    <p:spTree>
+      <p:nvGrpSpPr>
+        <p:cNvPr id="1" name=""/>
+        <p:cNvGrpSpPr/>
+        <p:nvPr/>
+      </p:nvGrpSpPr>
+      <p:grpSpPr/>
+      <p:sp>
+        <p:nvSpPr>
+          <p:cNvPr id="2" name="TextBox 1"/>
+          <p:cNvSpPr txBox="1"/>
+          <p:nvPr/>
+        </p:nvSpPr>
+        <p:spPr>
+          <a:xfrm>
+            <a:off x="457200" y="274320"/>
+            <a:ext cx="8229600" cy="640080"/>
+          </a:xfrm>
+          <a:prstGeom prst="rect">
+            <a:avLst/>
+          </a:prstGeom>
+          <a:noFill/>
+        </p:spPr>
+        <p:txBody>
+          <a:bodyPr wrap="square">
+            <a:spAutoFit/>
+          </a:bodyPr>
+          <a:lstStyle/>
+          <a:p>
+            <a:r>
+              <a:rPr sz="2200" b="1">
+                <a:solidFill>
+                  <a:srgbClr val="0B3D2E"/>
+                </a:solidFill>
+              </a:rPr>
+              <a:t>Diagrama de la clase</a:t>
+            </a:r>
+          </a:p>
+        </p:txBody>
+      </p:sp>
+      <p:pic>
+        <p:nvPicPr>
+          <p:cNvPr id="3" name="Picture 2" descr="da6867488b47dc45.png"/>
+          <p:cNvPicPr>
+            <a:picLocks noChangeAspect="1"/>
+          </p:cNvPicPr>
+          <p:nvPr/>
+        </p:nvPicPr>
+        <p:blipFill>
+          <a:blip r:embed="rId2"/>
+          <a:stretch>
+            <a:fillRect/>
+          </a:stretch>
+        </p:blipFill>
+        <p:spPr>
+          <a:xfrm>
+            <a:off x="457200" y="3285214"/>
+            <a:ext cx="8229600" cy="927652"/>
+          </a:xfrm>
+          <a:prstGeom prst="rect">
+            <a:avLst/>
+          </a:prstGeom>
+        </p:spPr>
+      </p:pic>
     </p:spTree>
   </p:cSld>
   <p:clrMapOvr>
@@ -3728,7 +4329,7 @@
                   <a:srgbClr val="22282E"/>
                 </a:solidFill>
               </a:rPr>
-              <a:t>•  Construir y operar un programa de gestión de vulnerabilidades (VM) completo: no un escaneo aislado, sino un ciclo continuo de descubrimiento, priorización basada en riesgo, remediación con SLAs y medición. Aprenderás a priorizar con CVSS + EPSS + CISA KEV en lugar de perseguir solo el número más alto, y a demostrar mejora con métricas —material del dominio de Vulnerability Management de CySA+ y de NIST SP 800-40.</a:t>
+              <a:t>•  Construir y operar un programa de gestión de vulnerabilidades (VM) completo: no un escaneo aislado, sino un ciclo continuo de descubrimiento, priorización basada en riesgo, remediación con SLAs y…</a:t>
             </a:r>
           </a:p>
         </p:txBody>
@@ -4122,7 +4723,7 @@
                   <a:srgbClr val="0B3D2E"/>
                 </a:solidFill>
               </a:rPr>
-              <a:t>📖 Definiciones y características</a:t>
+              <a:t>🧠 Modelo mental y caso de decisión</a:t>
             </a:r>
           </a:p>
         </p:txBody>
@@ -4160,97 +4761,22 @@
                   <a:srgbClr val="22282E"/>
                 </a:solidFill>
               </a:rPr>
-              <a:t>•  Gestión de vulnerabilidades (VM): proceso continuo de identificar, evaluar, tratar y reportar vulnerabilidades. Característica clave: cíclico y basado en riesgo, no un escaneo puntual.</a:t>
-            </a:r>
-          </a:p>
-          <a:p>
-            <a:pPr>
-              <a:spcAft>
-                <a:spcPts val="600"/>
-              </a:spcAft>
-            </a:pPr>
-            <a:r>
-              <a:rPr sz="1500">
-                <a:solidFill>
-                  <a:srgbClr val="22282E"/>
-                </a:solidFill>
-              </a:rPr>
-              <a:t>•  Escaneo autenticado (credentialed): el escáner inicia sesión en el activo y lee versión de paquetes/parches. Característica clave: mucho más preciso y con menos falsos positivos que el no autenticado.</a:t>
-            </a:r>
-          </a:p>
-          <a:p>
-            <a:pPr>
-              <a:spcAft>
-                <a:spcPts val="600"/>
-              </a:spcAft>
-            </a:pPr>
-            <a:r>
-              <a:rPr sz="1500">
-                <a:solidFill>
-                  <a:srgbClr val="22282E"/>
-                </a:solidFill>
-              </a:rPr>
-              <a:t>•  CVSS (Common Vulnerability Scoring System): puntúa la severidad técnica de 0.0 a 10.0. Base (intrínseca), Temporal (madurez del exploit) y Environmental (ajuste al contexto propio). Característica clave: mide severidad, no probabilidad ni impacto de negocio.</a:t>
-            </a:r>
-          </a:p>
-          <a:p>
-            <a:pPr>
-              <a:spcAft>
-                <a:spcPts val="600"/>
-              </a:spcAft>
-            </a:pPr>
-            <a:r>
-              <a:rPr sz="1500">
-                <a:solidFill>
-                  <a:srgbClr val="22282E"/>
-                </a:solidFill>
-              </a:rPr>
-              <a:t>•  EPSS (Exploit Prediction Scoring System): probabilidad (0–1) de que una CVE sea explotada en los próximos 30 días, según datos observados. Característica clave: complementa a CVSS con likelihood real.</a:t>
-            </a:r>
-          </a:p>
-          <a:p>
-            <a:pPr>
-              <a:spcAft>
-                <a:spcPts val="600"/>
-              </a:spcAft>
-            </a:pPr>
-            <a:r>
-              <a:rPr sz="1500">
-                <a:solidFill>
-                  <a:srgbClr val="22282E"/>
-                </a:solidFill>
-              </a:rPr>
-              <a:t>•  CISA KEV (Known Exploited Vulnerabilities): catálogo de CVEs con explotación confirmada en la práctica. Característica clave: si una CVE está en KEV, se remedia con máxima urgencia sin importar su CVSS.</a:t>
-            </a:r>
-          </a:p>
-          <a:p>
-            <a:pPr>
-              <a:spcAft>
-                <a:spcPts val="600"/>
-              </a:spcAft>
-            </a:pPr>
-            <a:r>
-              <a:rPr sz="1500">
-                <a:solidFill>
-                  <a:srgbClr val="22282E"/>
-                </a:solidFill>
-              </a:rPr>
-              <a:t>•  SLA de remediación: plazo máximo para corregir según criticidad (p. ej. Crítica 7–15 días, Alta 30, Media 90). Característica clave: hace exigible la remediación y permite medir cumplimiento.</a:t>
-            </a:r>
-          </a:p>
-          <a:p>
-            <a:pPr>
-              <a:spcAft>
-                <a:spcPts val="600"/>
-              </a:spcAft>
-            </a:pPr>
-            <a:r>
-              <a:rPr sz="1500">
-                <a:solidFill>
-                  <a:srgbClr val="22282E"/>
-                </a:solidFill>
-              </a:rPr>
-              <a:t>•  MTTR (Mean Time To Remediate): tiempo medio desde detección hasta corrección. Característica clave: métrica central de eficiencia del programa.</a:t>
+              <a:t>•  El programa convierte inventario y hallazgos en tratamiento verificable, no en una carrera por cerrar conteos.</a:t>
+            </a:r>
+          </a:p>
+          <a:p>
+            <a:pPr>
+              <a:spcAft>
+                <a:spcPts val="600"/>
+              </a:spcAft>
+            </a:pPr>
+            <a:r>
+              <a:rPr sz="1500">
+                <a:solidFill>
+                  <a:srgbClr val="22282E"/>
+                </a:solidFill>
+              </a:rPr>
+              <a:t>•  Caso razonado. Un crítico no desplegado recibe menos prioridad que una vulnerabilidad explotada en servicio público.</a:t>
             </a:r>
           </a:p>
         </p:txBody>
@@ -4301,7 +4827,7 @@
                   <a:srgbClr val="0B3D2E"/>
                 </a:solidFill>
               </a:rPr>
-              <a:t>🧰 Herramientas y preparación</a:t>
+              <a:t>📔 Glosario operativo complementario</a:t>
             </a:r>
           </a:p>
         </p:txBody>
@@ -4339,82 +4865,52 @@
                   <a:srgbClr val="22282E"/>
                 </a:solidFill>
               </a:rPr>
-              <a:t>•  Monta un laboratorio de VM aislado (nunca escanees activos ajenos sin autorización):</a:t>
-            </a:r>
-          </a:p>
-          <a:p>
-            <a:pPr>
-              <a:spcAft>
-                <a:spcPts val="600"/>
-              </a:spcAft>
-            </a:pPr>
-            <a:r>
-              <a:rPr sz="1500">
-                <a:solidFill>
-                  <a:srgbClr val="22282E"/>
-                </a:solidFill>
-              </a:rPr>
-              <a:t>•  Escáner: OpenVAS/Greenbone (gratuito) o Nessus Essentials en una VM.</a:t>
-            </a:r>
-          </a:p>
-          <a:p>
-            <a:pPr>
-              <a:spcAft>
-                <a:spcPts val="600"/>
-              </a:spcAft>
-            </a:pPr>
-            <a:r>
-              <a:rPr sz="1500">
-                <a:solidFill>
-                  <a:srgbClr val="22282E"/>
-                </a:solidFill>
-              </a:rPr>
-              <a:t>•  Objetivo de práctica: Metasploitable 2/3 o una VM con software antiguo, en red host-only.</a:t>
-            </a:r>
-          </a:p>
-          <a:p>
-            <a:pPr>
-              <a:spcAft>
-                <a:spcPts val="600"/>
-              </a:spcAft>
-            </a:pPr>
-            <a:r>
-              <a:rPr sz="1500">
-                <a:solidFill>
-                  <a:srgbClr val="22282E"/>
-                </a:solidFill>
-              </a:rPr>
-              <a:t>•  Fuentes de priorización: API pública de EPSS (FIRST.org), catálogo CISA KEV (JSON descargable), y NVD para CVSS.</a:t>
-            </a:r>
-          </a:p>
-          <a:p>
-            <a:pPr>
-              <a:spcAft>
-                <a:spcPts val="600"/>
-              </a:spcAft>
-            </a:pPr>
-            <a:r>
-              <a:rPr sz="1500">
-                <a:solidFill>
-                  <a:srgbClr val="22282E"/>
-                </a:solidFill>
-              </a:rPr>
-              <a:t>•  Hoja de cálculo o script Python para cruzar CVE × CVSS × EPSS × KEV y ordenar por riesgo.</a:t>
-            </a:r>
-          </a:p>
-          <a:p>
-            <a:pPr>
-              <a:spcAft>
-                <a:spcPts val="600"/>
-              </a:spcAft>
-            </a:pPr>
-            <a:r>
-              <a:rPr sz="1500">
-                <a:solidFill>
-                  <a:srgbClr val="22282E"/>
-                </a:solidFill>
-              </a:rPr>
-              <a:t>•  Gestor de tickets (Jira, GitHub Issues) para simular el flujo de remediación.</a:t>
+              <a:t>•  Término — Definición</a:t>
+            </a:r>
+          </a:p>
+          <a:p>
+            <a:pPr>
+              <a:spcAft>
+                <a:spcPts val="600"/>
+              </a:spcAft>
+            </a:pPr>
+            <a:r>
+              <a:rPr sz="1500">
+                <a:solidFill>
+                  <a:srgbClr val="22282E"/>
+                </a:solidFill>
+              </a:rPr>
+              <a:t>•  Evidencia — Información cuya procedencia y relación con un criterio pueden revisarse.</a:t>
+            </a:r>
+          </a:p>
+          <a:p>
+            <a:pPr>
+              <a:spcAft>
+                <a:spcPts val="600"/>
+              </a:spcAft>
+            </a:pPr>
+            <a:r>
+              <a:rPr sz="1500">
+                <a:solidFill>
+                  <a:srgbClr val="22282E"/>
+                </a:solidFill>
+              </a:rPr>
+              <a:t>•  Supuesto — Condición declarada de la que depende una conclusión.</a:t>
+            </a:r>
+          </a:p>
+          <a:p>
+            <a:pPr>
+              <a:spcAft>
+                <a:spcPts val="600"/>
+              </a:spcAft>
+            </a:pPr>
+            <a:r>
+              <a:rPr sz="1500">
+                <a:solidFill>
+                  <a:srgbClr val="22282E"/>
+                </a:solidFill>
+              </a:rPr>
+              <a:t>•  Riesgo residual — Exposición que permanece después del tratamiento.</a:t>
             </a:r>
           </a:p>
         </p:txBody>
@@ -4465,7 +4961,7 @@
                   <a:srgbClr val="0B3D2E"/>
                 </a:solidFill>
               </a:rPr>
-              <a:t>🧪 Laboratorio guiado — Construir un pipeline de priorización de VM</a:t>
+              <a:t>✅ Criterio de dominio</a:t>
             </a:r>
           </a:p>
         </p:txBody>
@@ -4503,97 +4999,7 @@
                   <a:srgbClr val="22282E"/>
                 </a:solidFill>
               </a:rPr>
-              <a:t>•  Ejercicio aplicado: escanearás un objetivo de laboratorio y construirás una cola de remediación priorizada por riesgo con SLAs.</a:t>
-            </a:r>
-          </a:p>
-          <a:p>
-            <a:pPr>
-              <a:spcAft>
-                <a:spcPts val="600"/>
-              </a:spcAft>
-            </a:pPr>
-            <a:r>
-              <a:rPr sz="1500">
-                <a:solidFill>
-                  <a:srgbClr val="22282E"/>
-                </a:solidFill>
-              </a:rPr>
-              <a:t>•  Inventaría el objetivo. En la red host-only, identifica el activo (Metasploitable) y clasifícalo por criticidad de negocio (aquí: bajo, es lab).</a:t>
-            </a:r>
-          </a:p>
-          <a:p>
-            <a:pPr>
-              <a:spcAft>
-                <a:spcPts val="600"/>
-              </a:spcAft>
-            </a:pPr>
-            <a:r>
-              <a:rPr sz="1500">
-                <a:solidFill>
-                  <a:srgbClr val="22282E"/>
-                </a:solidFill>
-              </a:rPr>
-              <a:t>•  Escaneo no autenticado. Lanza Greenbone/OpenVAS contra el objetivo. Guarda el reporte (lista de CVEs con CVSS).</a:t>
-            </a:r>
-          </a:p>
-          <a:p>
-            <a:pPr>
-              <a:spcAft>
-                <a:spcPts val="600"/>
-              </a:spcAft>
-            </a:pPr>
-            <a:r>
-              <a:rPr sz="1500">
-                <a:solidFill>
-                  <a:srgbClr val="22282E"/>
-                </a:solidFill>
-              </a:rPr>
-              <a:t>•  Escaneo autenticado. Repite con credenciales del sistema y compara: observa cuántas vulnerabilidades adicionales aparecen y cuántos falsos positivos se reducen.</a:t>
-            </a:r>
-          </a:p>
-          <a:p>
-            <a:pPr>
-              <a:spcAft>
-                <a:spcPts val="600"/>
-              </a:spcAft>
-            </a:pPr>
-            <a:r>
-              <a:rPr sz="1500">
-                <a:solidFill>
-                  <a:srgbClr val="22282E"/>
-                </a:solidFill>
-              </a:rPr>
-              <a:t>•  Extrae las CVEs. Exporta a CSV: CVE, CVSSbase, activo, severidad.</a:t>
-            </a:r>
-          </a:p>
-          <a:p>
-            <a:pPr>
-              <a:spcAft>
-                <a:spcPts val="600"/>
-              </a:spcAft>
-            </a:pPr>
-            <a:r>
-              <a:rPr sz="1500">
-                <a:solidFill>
-                  <a:srgbClr val="22282E"/>
-                </a:solidFill>
-              </a:rPr>
-              <a:t>•  Enriquece con EPSS. Consulta la API de FIRST (https://api.first.org/data/v1/epss?cve=CVE-XXXX-YYYY) y añade la columna epss.</a:t>
-            </a:r>
-          </a:p>
-          <a:p>
-            <a:pPr>
-              <a:spcAft>
-                <a:spcPts val="600"/>
-              </a:spcAft>
-            </a:pPr>
-            <a:r>
-              <a:rPr sz="1500">
-                <a:solidFill>
-                  <a:srgbClr val="22282E"/>
-                </a:solidFill>
-              </a:rPr>
-              <a:t>•  Cruza con KEV. Descarga el JSON de CISA KEV y marca enkev = sí/no para cada CVE.</a:t>
+              <a:t>•  El alumno demuestra dominio cuando explica el diagrama, resuelve el caso con evidencia, declara límites y puede defender por qué su decisión cambia si cambia un supuesto.</a:t>
             </a:r>
           </a:p>
         </p:txBody>
@@ -4644,7 +5050,7 @@
                   <a:srgbClr val="0B3D2E"/>
                 </a:solidFill>
               </a:rPr>
-              <a:t>✍️ Ejercicios</a:t>
+              <a:t>📖 Definiciones y características</a:t>
             </a:r>
           </a:p>
         </p:txBody>
@@ -4682,82 +5088,97 @@
                   <a:srgbClr val="22282E"/>
                 </a:solidFill>
               </a:rPr>
-              <a:t>•  Dada una lista de 5 CVEs con su CVSS y EPSS, ordénalas por riesgo y justifica por qué EPSS puede subir o bajar la prioridad frente a CVSS solo.</a:t>
-            </a:r>
-          </a:p>
-          <a:p>
-            <a:pPr>
-              <a:spcAft>
-                <a:spcPts val="600"/>
-              </a:spcAft>
-            </a:pPr>
-            <a:r>
-              <a:rPr sz="1500">
-                <a:solidFill>
-                  <a:srgbClr val="22282E"/>
-                </a:solidFill>
-              </a:rPr>
-              <a:t>•  Explica por qué una CVE con CVSS 6.5 en KEV puede ser más urgente que una CVSS 9.8 que no lo está.</a:t>
-            </a:r>
-          </a:p>
-          <a:p>
-            <a:pPr>
-              <a:spcAft>
-                <a:spcPts val="600"/>
-              </a:spcAft>
-            </a:pPr>
-            <a:r>
-              <a:rPr sz="1500">
-                <a:solidFill>
-                  <a:srgbClr val="22282E"/>
-                </a:solidFill>
-              </a:rPr>
-              <a:t>•  Diseña una tabla de SLAs para tres niveles de criticidad de activo (crítico/importante/estándar) × cuatro prioridades.</a:t>
-            </a:r>
-          </a:p>
-          <a:p>
-            <a:pPr>
-              <a:spcAft>
-                <a:spcPts val="600"/>
-              </a:spcAft>
-            </a:pPr>
-            <a:r>
-              <a:rPr sz="1500">
-                <a:solidFill>
-                  <a:srgbClr val="22282E"/>
-                </a:solidFill>
-              </a:rPr>
-              <a:t>•  Redacta una plantilla de excepción de riesgo con todos los campos obligatorios.</a:t>
-            </a:r>
-          </a:p>
-          <a:p>
-            <a:pPr>
-              <a:spcAft>
-                <a:spcPts val="600"/>
-              </a:spcAft>
-            </a:pPr>
-            <a:r>
-              <a:rPr sz="1500">
-                <a:solidFill>
-                  <a:srgbClr val="22282E"/>
-                </a:solidFill>
-              </a:rPr>
-              <a:t>•  Calcula el MTTR de un conjunto de tickets con fechas de apertura/cierre dado.</a:t>
-            </a:r>
-          </a:p>
-          <a:p>
-            <a:pPr>
-              <a:spcAft>
-                <a:spcPts val="600"/>
-              </a:spcAft>
-            </a:pPr>
-            <a:r>
-              <a:rPr sz="1500">
-                <a:solidFill>
-                  <a:srgbClr val="22282E"/>
-                </a:solidFill>
-              </a:rPr>
-              <a:t>•  Propón tres métricas para reportar al comité de riesgos y qué decisión habilita cada una.</a:t>
+              <a:t>•  Gestión de vulnerabilidades (VM): proceso continuo de identificar, evaluar, tratar y reportar vulnerabilidades. Característica clave: cíclico y basado en riesgo, no un escaneo puntual.</a:t>
+            </a:r>
+          </a:p>
+          <a:p>
+            <a:pPr>
+              <a:spcAft>
+                <a:spcPts val="600"/>
+              </a:spcAft>
+            </a:pPr>
+            <a:r>
+              <a:rPr sz="1500">
+                <a:solidFill>
+                  <a:srgbClr val="22282E"/>
+                </a:solidFill>
+              </a:rPr>
+              <a:t>•  Escaneo autenticado (credentialed): el escáner inicia sesión en el activo y lee versión de paquetes/parches. Característica clave: mucho más preciso y con menos falsos positivos que el no autenticado.</a:t>
+            </a:r>
+          </a:p>
+          <a:p>
+            <a:pPr>
+              <a:spcAft>
+                <a:spcPts val="600"/>
+              </a:spcAft>
+            </a:pPr>
+            <a:r>
+              <a:rPr sz="1500">
+                <a:solidFill>
+                  <a:srgbClr val="22282E"/>
+                </a:solidFill>
+              </a:rPr>
+              <a:t>•  CVSS (Common Vulnerability Scoring System): puntúa la severidad técnica de 0.0 a 10.0. Base (intrínseca), Temporal (madurez del exploit) y Environmental (ajuste al contexto propio). Característica…</a:t>
+            </a:r>
+          </a:p>
+          <a:p>
+            <a:pPr>
+              <a:spcAft>
+                <a:spcPts val="600"/>
+              </a:spcAft>
+            </a:pPr>
+            <a:r>
+              <a:rPr sz="1500">
+                <a:solidFill>
+                  <a:srgbClr val="22282E"/>
+                </a:solidFill>
+              </a:rPr>
+              <a:t>•  EPSS (Exploit Prediction Scoring System): probabilidad (0–1) de que una CVE sea explotada en los próximos 30 días, según datos observados. Característica clave: complementa a CVSS con likelihood real.</a:t>
+            </a:r>
+          </a:p>
+          <a:p>
+            <a:pPr>
+              <a:spcAft>
+                <a:spcPts val="600"/>
+              </a:spcAft>
+            </a:pPr>
+            <a:r>
+              <a:rPr sz="1500">
+                <a:solidFill>
+                  <a:srgbClr val="22282E"/>
+                </a:solidFill>
+              </a:rPr>
+              <a:t>•  CISA KEV (Known Exploited Vulnerabilities): catálogo de CVEs con explotación confirmada en la práctica. Característica clave: si una CVE está en KEV, se remedia con máxima urgencia sin importar su…</a:t>
+            </a:r>
+          </a:p>
+          <a:p>
+            <a:pPr>
+              <a:spcAft>
+                <a:spcPts val="600"/>
+              </a:spcAft>
+            </a:pPr>
+            <a:r>
+              <a:rPr sz="1500">
+                <a:solidFill>
+                  <a:srgbClr val="22282E"/>
+                </a:solidFill>
+              </a:rPr>
+              <a:t>•  SLA de remediación: plazo máximo para corregir según criticidad (p. ej. Crítica 7–15 días, Alta 30, Media 90). Característica clave: hace exigible la remediación y permite medir cumplimiento.</a:t>
+            </a:r>
+          </a:p>
+          <a:p>
+            <a:pPr>
+              <a:spcAft>
+                <a:spcPts val="600"/>
+              </a:spcAft>
+            </a:pPr>
+            <a:r>
+              <a:rPr sz="1500">
+                <a:solidFill>
+                  <a:srgbClr val="22282E"/>
+                </a:solidFill>
+              </a:rPr>
+              <a:t>•  MTTR (Mean Time To Remediate): tiempo medio desde detección hasta corrección. Característica clave: métrica central de eficiencia del programa.</a:t>
             </a:r>
           </a:p>
         </p:txBody>
@@ -4808,7 +5229,7 @@
                   <a:srgbClr val="0B3D2E"/>
                 </a:solidFill>
               </a:rPr>
-              <a:t>📝 Reto verificable</a:t>
+              <a:t>🧰 Herramientas y preparación</a:t>
             </a:r>
           </a:p>
         </p:txBody>
@@ -4846,82 +5267,82 @@
                   <a:srgbClr val="22282E"/>
                 </a:solidFill>
               </a:rPr>
-              <a:t>•  Reto: entrega un pipeline de priorización de VM funcional que cruce, para al menos 15 CVEs reales, CVSS + EPSS + KEV y produzca una cola ordenada con SLAs asignados y métricas del ciclo.</a:t>
-            </a:r>
-          </a:p>
-          <a:p>
-            <a:pPr>
-              <a:spcAft>
-                <a:spcPts val="600"/>
-              </a:spcAft>
-            </a:pPr>
-            <a:r>
-              <a:rPr sz="1500">
-                <a:solidFill>
-                  <a:srgbClr val="22282E"/>
-                </a:solidFill>
-              </a:rPr>
-              <a:t>•  Criterio de aceptación:</a:t>
-            </a:r>
-          </a:p>
-          <a:p>
-            <a:pPr>
-              <a:spcAft>
-                <a:spcPts val="600"/>
-              </a:spcAft>
-            </a:pPr>
-            <a:r>
-              <a:rPr sz="1500">
-                <a:solidFill>
-                  <a:srgbClr val="22282E"/>
-                </a:solidFill>
-              </a:rPr>
-              <a:t>•  Toda CVE presente en KEV queda como prioridad máxima, independientemente de su CVSS.</a:t>
-            </a:r>
-          </a:p>
-          <a:p>
-            <a:pPr>
-              <a:spcAft>
-                <a:spcPts val="600"/>
-              </a:spcAft>
-            </a:pPr>
-            <a:r>
-              <a:rPr sz="1500">
-                <a:solidFill>
-                  <a:srgbClr val="22282E"/>
-                </a:solidFill>
-              </a:rPr>
-              <a:t>•  La priorización usa las tres señales (severidad, probabilidad, explotación activa), no solo CVSS.</a:t>
-            </a:r>
-          </a:p>
-          <a:p>
-            <a:pPr>
-              <a:spcAft>
-                <a:spcPts val="600"/>
-              </a:spcAft>
-            </a:pPr>
-            <a:r>
-              <a:rPr sz="1500">
-                <a:solidFill>
-                  <a:srgbClr val="22282E"/>
-                </a:solidFill>
-              </a:rPr>
-              <a:t>•  Cada prioridad tiene un SLA numérico y una fecha límite calculada desde la detección.</a:t>
-            </a:r>
-          </a:p>
-          <a:p>
-            <a:pPr>
-              <a:spcAft>
-                <a:spcPts val="600"/>
-              </a:spcAft>
-            </a:pPr>
-            <a:r>
-              <a:rPr sz="1500">
-                <a:solidFill>
-                  <a:srgbClr val="22282E"/>
-                </a:solidFill>
-              </a:rPr>
-              <a:t>•  Se reportan al menos MTTR y % de remediación dentro de SLA.</a:t>
+              <a:t>•  Monta un laboratorio de VM aislado (nunca escanees activos ajenos sin autorización):</a:t>
+            </a:r>
+          </a:p>
+          <a:p>
+            <a:pPr>
+              <a:spcAft>
+                <a:spcPts val="600"/>
+              </a:spcAft>
+            </a:pPr>
+            <a:r>
+              <a:rPr sz="1500">
+                <a:solidFill>
+                  <a:srgbClr val="22282E"/>
+                </a:solidFill>
+              </a:rPr>
+              <a:t>•  Escáner: OpenVAS/Greenbone (gratuito) o Nessus Essentials en una VM.</a:t>
+            </a:r>
+          </a:p>
+          <a:p>
+            <a:pPr>
+              <a:spcAft>
+                <a:spcPts val="600"/>
+              </a:spcAft>
+            </a:pPr>
+            <a:r>
+              <a:rPr sz="1500">
+                <a:solidFill>
+                  <a:srgbClr val="22282E"/>
+                </a:solidFill>
+              </a:rPr>
+              <a:t>•  Objetivo de práctica: Metasploitable 2/3 o una VM con software antiguo, en red host-only.</a:t>
+            </a:r>
+          </a:p>
+          <a:p>
+            <a:pPr>
+              <a:spcAft>
+                <a:spcPts val="600"/>
+              </a:spcAft>
+            </a:pPr>
+            <a:r>
+              <a:rPr sz="1500">
+                <a:solidFill>
+                  <a:srgbClr val="22282E"/>
+                </a:solidFill>
+              </a:rPr>
+              <a:t>•  Fuentes de priorización: API pública de EPSS (FIRST.org), catálogo CISA KEV (JSON descargable), y NVD para CVSS.</a:t>
+            </a:r>
+          </a:p>
+          <a:p>
+            <a:pPr>
+              <a:spcAft>
+                <a:spcPts val="600"/>
+              </a:spcAft>
+            </a:pPr>
+            <a:r>
+              <a:rPr sz="1500">
+                <a:solidFill>
+                  <a:srgbClr val="22282E"/>
+                </a:solidFill>
+              </a:rPr>
+              <a:t>•  Hoja de cálculo o script Python para cruzar CVE × CVSS × EPSS × KEV y ordenar por riesgo.</a:t>
+            </a:r>
+          </a:p>
+          <a:p>
+            <a:pPr>
+              <a:spcAft>
+                <a:spcPts val="600"/>
+              </a:spcAft>
+            </a:pPr>
+            <a:r>
+              <a:rPr sz="1500">
+                <a:solidFill>
+                  <a:srgbClr val="22282E"/>
+                </a:solidFill>
+              </a:rPr>
+              <a:t>•  Gestor de tickets (Jira, GitHub Issues) para simular el flujo de remediación.</a:t>
             </a:r>
           </a:p>
         </p:txBody>
